--- a/PPTs/L4-Exercises ANS.pptx
+++ b/PPTs/L4-Exercises ANS.pptx
@@ -968,13 +968,13 @@
           <a:p>
             <a:r>
               <a:rPr lang="en-GB" dirty="0"/>
-              <a:t>https://people.eecs.berkeley.edu/~kubitron/courses/cs162-F07/exams/fa07mt1-solutions.pdf</a:t>
+              <a:t>Check: Available A = [0 0 0 0 1]. Only P4 can run (Need = [0 0 0 0 1], i.e. R5). After P4 finishes it releases R4, so A = [0 0 0 1 1]; then P3 (needs R4), P2 (needs R3) and P1 (needs R2) can finish in turn, releasing R3, R2, R1; finally P5 (needs R1 and R5) finishes. At each step exactly one process can proceed, so P4, P3, P2, P1, P5 is the only safe sequence.</a:t>
             </a:r>
           </a:p>
           <a:p>
             <a:r>
               <a:rPr lang="en-GB" dirty="0"/>
-              <a:t>The lawyers are so busy talking that they can only grab one chopstick at a time. Design a deadlock-free algorithm using monitors and Bankers algorithm. </a:t>
+              <a:t/>
             </a:r>
             <a:endParaRPr lang="en-SE" dirty="0"/>
           </a:p>
@@ -1045,7 +1045,7 @@
           <a:p>
             <a:r>
               <a:rPr lang="en-GB" dirty="0"/>
-              <a:t>The lawyers are so busy talking that they can only grab one chopstick at a time. Design a deadlock-free algorithm using monitors and Bankers algorithm. </a:t>
+              <a:t>The lawyers are so busy talking that they can only grab one chopstick at a time. Design a deadlock-free algorithm using monitors and Banker’s algorithm. </a:t>
             </a:r>
             <a:endParaRPr lang="en-SE" dirty="0"/>
           </a:p>
@@ -1239,14 +1239,14 @@
                 <a:effectLst/>
                 <a:latin typeface="gg sans"/>
               </a:rPr>
-              <a:t>there </a:t>
+              <a:t>A deadlock requires a circular wait. Here every lawyer takes a knife first and a fork second, so a lawyer waiting for a fork holds only a knife, and a lawyer waiting for a knife holds nothing. A lawyer holding a fork already has both utensils and is eating, so it never waits. Hence no cycle can form.</a:t>
             </a:r>
             <a:r>
               <a:rPr lang="en-GB" b="0" i="0" dirty="0">
                 <a:effectLst/>
                 <a:latin typeface="gg sans"/>
               </a:rPr>
-              <a:t>is only deadlock when you hold a fork and waits for a fork. No deadlock if you hold a fork and waits for a knife as no cycle is formed.</a:t>
+              <a:t/>
             </a:r>
             <a:endParaRPr lang="en-SE" dirty="0"/>
           </a:p>
@@ -1329,7 +1329,7 @@
           <a:p>
             <a:r>
               <a:rPr lang="en-GB" dirty="0"/>
-              <a:t>A</a:t>
+              <a:t>Same argument as for the previous question: every lawyer first takes 2 knives atomically, then 2 forks atomically. A lawyer waiting for knives holds nothing; a lawyer waiting for forks holds only knives; a lawyer holding forks already has all it needs and is eating. Hence no circular wait can form.</a:t>
             </a:r>
           </a:p>
           <a:p>
@@ -4905,7 +4905,7 @@
         </p:nvSpPr>
         <p:spPr>
           <a:xfrm>
-            <a:off x="917827" y="-205136"/>
+            <a:off x="914400" y="-205136"/>
             <a:ext cx="10363200" cy="1143000"/>
           </a:xfrm>
         </p:spPr>
@@ -4915,10 +4915,10 @@
           <a:p>
             <a:pPr eaLnBrk="1" hangingPunct="1"/>
             <a:r>
-              <a:rPr lang="en-US" altLang="zh-CN" dirty="0">
+              <a:rPr lang="en-US" altLang="zh-CN" dirty="0" sz="2400">
                 <a:ea typeface="宋体" charset="-122"/>
               </a:rPr>
-              <a:t>Banker’s Algorithm: 4 philosophers each holding his left fork ANS</a:t>
+              <a:t>Banker’s algorithm: 4 philosophers each holding his left fork ANS</a:t>
             </a:r>
           </a:p>
         </p:txBody>
@@ -6991,8 +6991,8 @@
         </p:nvSpPr>
         <p:spPr>
           <a:xfrm>
-            <a:off x="1219200" y="-209993"/>
-            <a:ext cx="9829800" cy="1143000"/>
+            <a:off x="914400" y="-114300"/>
+            <a:ext cx="10363200" cy="1143000"/>
           </a:xfrm>
         </p:spPr>
         <p:txBody>
@@ -7004,7 +7004,7 @@
               <a:rPr lang="en-US" altLang="zh-CN" dirty="0">
                 <a:ea typeface="宋体" charset="-122"/>
               </a:rPr>
-              <a:t>Banker’s Algorithm: 5 philosophers each holding his left fork</a:t>
+              <a:t>Banker’s algorithm: 5 philosophers each holding his left fork</a:t>
             </a:r>
           </a:p>
         </p:txBody>
@@ -8318,7 +8318,7 @@
             </a:r>
             <a:r>
               <a:rPr lang="en-GB" dirty="0"/>
-              <a:t> of the table. In order to eat, a lawyer must have one chopstick in each hand. Assume total number of chopsticks &gt;= number of hands of each lawyer, so at least one lawyer can eat.</a:t>
+              <a:t> of the table. In order to eat, a lawyer must have one chopstick in each hand. Assume total number of chopsticks ≥ number of hands of each lawyer, so at least one lawyer can eat.</a:t>
             </a:r>
           </a:p>
           <a:p>
@@ -8351,8 +8351,8 @@
         </p:nvSpPr>
         <p:spPr bwMode="auto">
           <a:xfrm>
-            <a:off x="4267200" y="6477000"/>
-            <a:ext cx="4419600" cy="304801"/>
+            <a:off x="3296000" y="6477000"/>
+            <a:ext cx="5600000" cy="304801"/>
           </a:xfrm>
           <a:prstGeom prst="rect">
             <a:avLst/>
@@ -8394,7 +8394,7 @@
               <a:rPr lang="en-GB" sz="1400" b="0" dirty="0">
                 <a:latin typeface="Gill Sans" panose="020B0502020104020203"/>
               </a:rPr>
-              <a:t>Ack: this example is taken from UC Berkeley CS162 course.</a:t>
+              <a:t>Ack: this example is taken from UC Berkeley CS 162 course.</a:t>
             </a:r>
             <a:endParaRPr kumimoji="0" lang="en-SE" sz="1400" b="0" i="0" u="none" strike="noStrike" cap="none" normalizeH="0" baseline="0" dirty="0">
               <a:ln>
@@ -8553,7 +8553,7 @@
           <a:p>
             <a:r>
               <a:rPr lang="en-GB" dirty="0"/>
-              <a:t>Q2: Each lawyer grabs 1 chopstick. Is the current state safe? Check it using Banker’s algorithm. Check it using Banker’s algorithm.</a:t>
+              <a:t>Q2: Each lawyer grabs 1 chopstick. Is the current state safe? Check it using Banker’s algorithm.</a:t>
             </a:r>
           </a:p>
           <a:p>
@@ -10455,7 +10455,7 @@
             </a:pPr>
             <a:r>
               <a:rPr lang="en-GB" b="0" kern="0" dirty="0"/>
-              <a:t>Q1: Two lawyers each grab two chopsticks and start eating. </a:t>
+              <a:t>Q1: Two lawyers each grab two chopsticks and start eating. One lawyer grabs one chopstick. </a:t>
             </a:r>
             <a:r>
               <a:rPr lang="en-US" altLang="zh-CN" b="0" kern="0" dirty="0"/>
@@ -14493,7 +14493,7 @@
                 <a:ea typeface="宋体" charset="-122"/>
                 <a:cs typeface="+mn-cs"/>
               </a:rPr>
-              <a:t>Resource 1 (a fork) held by Thread 2</a:t>
+              <a:t>Resource 1 (a fork) held by P2</a:t>
             </a:r>
           </a:p>
         </p:txBody>
@@ -14596,7 +14596,7 @@
                 <a:ea typeface="宋体" charset="-122"/>
                 <a:cs typeface="+mn-cs"/>
               </a:rPr>
-              <a:t>Resource 2 (a knife) requested by Thread 2</a:t>
+              <a:t>Resource 2 (a knife) requested by P2</a:t>
             </a:r>
           </a:p>
         </p:txBody>
@@ -14802,7 +14802,7 @@
                 <a:ea typeface="宋体" charset="-122"/>
                 <a:cs typeface="+mn-cs"/>
               </a:rPr>
-              <a:t>Resource 1 (a fork) requested by Thread 2</a:t>
+              <a:t>Resource 1 (a fork) requested by P1</a:t>
             </a:r>
           </a:p>
         </p:txBody>
@@ -14857,7 +14857,7 @@
                 <a:ea typeface="宋体" charset="-122"/>
                 <a:cs typeface="+mn-cs"/>
               </a:rPr>
-              <a:t>Resource 2 (a knife) held by Thread 2</a:t>
+              <a:t>Resource 2 (a knife) held by P1</a:t>
             </a:r>
           </a:p>
         </p:txBody>
@@ -15496,7 +15496,7 @@
                 <a:ea typeface="宋体" charset="-122"/>
                 <a:cs typeface="+mn-cs"/>
               </a:rPr>
-              <a:t>Resource 1 (2 forks) held by Thread 2</a:t>
+              <a:t>Resource 1 (2 forks) held by P2</a:t>
             </a:r>
           </a:p>
         </p:txBody>
@@ -15599,7 +15599,7 @@
                 <a:ea typeface="宋体" charset="-122"/>
                 <a:cs typeface="+mn-cs"/>
               </a:rPr>
-              <a:t>Resource 2 (2 knives) requested by Thread 2</a:t>
+              <a:t>Resource 2 (2 knives) requested by P2</a:t>
             </a:r>
           </a:p>
         </p:txBody>
@@ -15805,7 +15805,7 @@
                 <a:ea typeface="宋体" charset="-122"/>
                 <a:cs typeface="+mn-cs"/>
               </a:rPr>
-              <a:t>Resource 1 (2 forks) requested by Thread 2</a:t>
+              <a:t>Resource 1 (2 forks) requested by P1</a:t>
             </a:r>
           </a:p>
         </p:txBody>
@@ -15860,7 +15860,7 @@
                 <a:ea typeface="宋体" charset="-122"/>
                 <a:cs typeface="+mn-cs"/>
               </a:rPr>
-              <a:t>Resource 2 (2 knives) held by Thread 2</a:t>
+              <a:t>Resource 2 (2 knives) held by P1</a:t>
             </a:r>
           </a:p>
         </p:txBody>
@@ -16039,7 +16039,7 @@
             </a:r>
             <a:r>
               <a:rPr lang="en-GB" dirty="0"/>
-              <a:t>. 2 waiting for L1 (held by </a:t>
+              <a:t>. 3 waiting for L3 (held by </a:t>
             </a:r>
             <a:r>
               <a:rPr lang="en-GB" dirty="0" err="1"/>
@@ -16047,7 +16047,7 @@
             </a:r>
             <a:r>
               <a:rPr lang="en-GB" dirty="0"/>
-              <a:t>. 1) → </a:t>
+              <a:t>. 2) → </a:t>
             </a:r>
             <a:r>
               <a:rPr lang="en-GB" dirty="0" err="1"/>
@@ -16055,7 +16055,7 @@
             </a:r>
             <a:r>
               <a:rPr lang="en-GB" dirty="0"/>
-              <a:t>. 3 waiting for L3 (held by </a:t>
+              <a:t>. 2 waiting for L1 (held by </a:t>
             </a:r>
             <a:r>
               <a:rPr lang="en-GB" dirty="0" err="1"/>
@@ -16063,7 +16063,7 @@
             </a:r>
             <a:r>
               <a:rPr lang="en-GB" dirty="0"/>
-              <a:t>. 2).</a:t>
+              <a:t>. 1).</a:t>
             </a:r>
           </a:p>
           <a:p>
@@ -17423,7 +17423,7 @@
           <a:p>
             <a:r>
               <a:rPr lang="en-GB" dirty="0"/>
-              <a:t>Recall: “Define a total order of resources; If a thread holds  certain resources, it can subsequently request only resources that follow the types of held resources in the total order.” Since all knives are the same and not numbered, you cannot form a total order like “request knife 1 before knife 2”. If a lawyer requests a knife while holding a knife, there may be circular waiting.</a:t>
+              <a:t>Recall: “Define a total order of resources; If a thread holds certain resources, it can subsequently request only resources that follow the types of held resources in the total order.” Since all knives are the same and not numbered, you cannot form a total order like “request knife 1 before knife 2”. If a lawyer requests a knife while holding a knife, there may be circular waiting.</a:t>
             </a:r>
           </a:p>
           <a:p>
@@ -17811,7 +17811,7 @@
                 <a:ea typeface="宋体" charset="-122"/>
                 <a:cs typeface="+mn-cs"/>
               </a:rPr>
-              <a:t>Resource 1 (a knife) held by Thread 2</a:t>
+              <a:t>Resource 1 (a knife) held by P2</a:t>
             </a:r>
           </a:p>
         </p:txBody>
@@ -17914,7 +17914,7 @@
                 <a:ea typeface="宋体" charset="-122"/>
                 <a:cs typeface="+mn-cs"/>
               </a:rPr>
-              <a:t>Resource 2 (a knife) requested by Thread 2</a:t>
+              <a:t>Resource 2 (a knife) requested by P2</a:t>
             </a:r>
           </a:p>
         </p:txBody>
@@ -18120,7 +18120,7 @@
                 <a:ea typeface="宋体" charset="-122"/>
                 <a:cs typeface="+mn-cs"/>
               </a:rPr>
-              <a:t>Resource 1 (a knife) requested by Thread 2</a:t>
+              <a:t>Resource 1 (a knife) requested by P1</a:t>
             </a:r>
           </a:p>
         </p:txBody>
@@ -18175,7 +18175,7 @@
                 <a:ea typeface="宋体" charset="-122"/>
                 <a:cs typeface="+mn-cs"/>
               </a:rPr>
-              <a:t>Resource 2 (a knife) held by Thread 2</a:t>
+              <a:t>Resource 2 (a knife) held by P1</a:t>
             </a:r>
           </a:p>
         </p:txBody>
@@ -21127,7 +21127,7 @@
           <a:p>
             <a:r>
               <a:rPr lang="en-GB" dirty="0"/>
-              <a:t>Quiz: Banker’s Algorithm I</a:t>
+              <a:t>Quiz: Banker’s algorithm I</a:t>
             </a:r>
             <a:endParaRPr lang="en-SE" dirty="0"/>
           </a:p>
@@ -22961,7 +22961,7 @@
           <a:p>
             <a:r>
               <a:rPr lang="en-GB" dirty="0"/>
-              <a:t>Quiz Solution: Banker’s Algorithm I</a:t>
+              <a:t>Quiz Solution: Banker’s algorithm I</a:t>
             </a:r>
             <a:endParaRPr lang="en-SE" dirty="0"/>
           </a:p>
@@ -25704,7 +25704,7 @@
                 <a:latin typeface="Gill Sans" panose="020B0502020104020203"/>
                 <a:ea typeface="宋体" charset="-122"/>
               </a:rPr>
-              <a:t>4 processes P1, P2, P3; 3 resource types R1, R2, R3 with 8, 6, 4 instances each.</a:t>
+              <a:t>3 processes P1, P2, P3; 3 resource types R1, R2, R3 with 8, 6, 4 instances each.</a:t>
             </a:r>
           </a:p>
           <a:p>
@@ -27245,7 +27245,7 @@
                 <a:latin typeface="Gill Sans" panose="020B0502020104020203"/>
                 <a:ea typeface="宋体" charset="-122"/>
               </a:rPr>
-              <a:t>P2, P2, P1 </a:t>
+              <a:t>P3, P2, P1 </a:t>
             </a:r>
             <a:endParaRPr lang="en-US" altLang="zh-CN" sz="2400" b="0" kern="0" dirty="0">
               <a:latin typeface="Gill Sans" panose="020B0502020104020203"/>
@@ -31600,7 +31600,7 @@
                 <a:latin typeface="Gill Sans" panose="020B0502020104020203"/>
                 <a:ea typeface="宋体" charset="-122"/>
               </a:rPr>
-              <a:t>The state is safe, with safe sequences of P2, P3, P1 or P2, P2, P1, so we can grant this request.</a:t>
+              <a:t>The state is safe, with safe sequences of P2, P3, P1 or P3, P2, P1, so we can grant this request.</a:t>
             </a:r>
             <a:endParaRPr lang="en-US" altLang="zh-CN" sz="2800" b="0" kern="0" dirty="0">
               <a:latin typeface="Gill Sans" panose="020B0502020104020203"/>
@@ -33942,7 +33942,7 @@
               <a:rPr lang="en-US" altLang="zh-CN" dirty="0">
                 <a:ea typeface="宋体" charset="-122"/>
               </a:rPr>
-              <a:t>Banker’s Algorithm: 4 philosophers each holding his left fork</a:t>
+              <a:t>Banker’s algorithm: 4 philosophers each holding his left fork</a:t>
             </a:r>
           </a:p>
         </p:txBody>
@@ -34138,7 +34138,7 @@
                 <a:ea typeface="+mn-ea"/>
                 <a:cs typeface="+mn-cs"/>
               </a:rPr>
-              <a:t>Suppose we have 5 philosophers P1-P5, and 5 forks R1-R5; philosopher Pi has left fork Ri, and right fork R(i+1)%5. </a:t>
+              <a:t>Suppose we have 5 philosophers P1-P5, and 5 forks R1-R5; philosopher Pi has left fork Ri, and right fork R(i%5+1). </a:t>
             </a:r>
             <a:r>
               <a:rPr lang="en-US" sz="2400" dirty="0">
@@ -35204,7 +35204,7 @@
           </p:nvPr>
         </p:nvGraphicFramePr>
         <p:xfrm>
-          <a:off x="8091273" y="4084320"/>
+          <a:off x="8091273" y="3990000"/>
           <a:ext cx="3310566" cy="2773680"/>
         </p:xfrm>
         <a:graphic>

--- a/PPTs/L4-Exercises ANS.pptx
+++ b/PPTs/L4-Exercises ANS.pptx
@@ -326,14 +326,14 @@
           <a:effectLst/>
           <a:extLst>
             <a:ext uri="{909E8E84-426E-40dd-AFC4-6F175D3DCCD1}">
-              <a14:hiddenFill xmlns:a14="http://schemas.microsoft.com/office/drawing/2010/main" xmlns="">
+              <a14:hiddenFill xmlns="" xmlns:a14="http://schemas.microsoft.com/office/drawing/2010/main">
                 <a:solidFill>
                   <a:schemeClr val="bg1"/>
                 </a:solidFill>
               </a14:hiddenFill>
             </a:ext>
             <a:ext uri="{91240B29-F687-4f45-9708-019B960494DF}">
-              <a14:hiddenLine xmlns:a14="http://schemas.microsoft.com/office/drawing/2010/main" xmlns="" w="12700">
+              <a14:hiddenLine xmlns="" xmlns:a14="http://schemas.microsoft.com/office/drawing/2010/main" w="12700">
                 <a:pattFill prst="narHorz">
                   <a:fgClr>
                     <a:schemeClr val="tx1"/>
@@ -348,7 +348,7 @@
               </a14:hiddenLine>
             </a:ext>
             <a:ext uri="{AF507438-7753-43e0-B8FC-AC1667EBCBE1}">
-              <a14:hiddenEffects xmlns:a14="http://schemas.microsoft.com/office/drawing/2010/main" xmlns="">
+              <a14:hiddenEffects xmlns="" xmlns:a14="http://schemas.microsoft.com/office/drawing/2010/main">
                 <a:effectLst>
                   <a:outerShdw dist="35921" dir="2700000" algn="ctr" rotWithShape="0">
                     <a:schemeClr val="bg2"/>
@@ -454,14 +454,14 @@
           <a:effectLst/>
           <a:extLst>
             <a:ext uri="{909E8E84-426E-40dd-AFC4-6F175D3DCCD1}">
-              <a14:hiddenFill xmlns:a14="http://schemas.microsoft.com/office/drawing/2010/main" xmlns="">
+              <a14:hiddenFill xmlns="" xmlns:a14="http://schemas.microsoft.com/office/drawing/2010/main">
                 <a:solidFill>
                   <a:schemeClr val="bg1"/>
                 </a:solidFill>
               </a14:hiddenFill>
             </a:ext>
             <a:ext uri="{91240B29-F687-4f45-9708-019B960494DF}">
-              <a14:hiddenLine xmlns:a14="http://schemas.microsoft.com/office/drawing/2010/main" xmlns="" w="12700">
+              <a14:hiddenLine xmlns="" xmlns:a14="http://schemas.microsoft.com/office/drawing/2010/main" w="12700">
                 <a:pattFill prst="narHorz">
                   <a:fgClr>
                     <a:schemeClr val="tx1"/>
@@ -476,7 +476,7 @@
               </a14:hiddenLine>
             </a:ext>
             <a:ext uri="{AF507438-7753-43e0-B8FC-AC1667EBCBE1}">
-              <a14:hiddenEffects xmlns:a14="http://schemas.microsoft.com/office/drawing/2010/main" xmlns="">
+              <a14:hiddenEffects xmlns="" xmlns:a14="http://schemas.microsoft.com/office/drawing/2010/main">
                 <a:effectLst>
                   <a:outerShdw dist="35921" dir="2700000" algn="ctr" rotWithShape="0">
                     <a:schemeClr val="bg2"/>
@@ -544,17 +544,17 @@
           <a:effectLst/>
           <a:extLst>
             <a:ext uri="{FAA26D3D-D897-4be2-8F04-BA451C77F1D7}">
-              <ma14:placeholderFlag xmlns:ma14="http://schemas.microsoft.com/office/mac/drawingml/2011/main" xmlns="" val="1"/>
+              <ma14:placeholderFlag xmlns="" xmlns:ma14="http://schemas.microsoft.com/office/mac/drawingml/2011/main" val="1"/>
             </a:ext>
             <a:ext uri="{909E8E84-426E-40dd-AFC4-6F175D3DCCD1}">
-              <a14:hiddenFill xmlns:a14="http://schemas.microsoft.com/office/drawing/2010/main" xmlns="">
+              <a14:hiddenFill xmlns="" xmlns:a14="http://schemas.microsoft.com/office/drawing/2010/main">
                 <a:solidFill>
                   <a:srgbClr val="FFFFFF"/>
                 </a:solidFill>
               </a14:hiddenFill>
             </a:ext>
             <a:ext uri="{AF507438-7753-43e0-B8FC-AC1667EBCBE1}">
-              <a14:hiddenEffects xmlns:a14="http://schemas.microsoft.com/office/drawing/2010/main" xmlns="">
+              <a14:hiddenEffects xmlns="" xmlns:a14="http://schemas.microsoft.com/office/drawing/2010/main">
                 <a:effectLst>
                   <a:outerShdw blurRad="63500" dist="38099" dir="2700000" algn="ctr" rotWithShape="0">
                     <a:srgbClr val="000000">
@@ -565,7 +565,7 @@
               </a14:hiddenEffects>
             </a:ext>
             <a:ext uri="{53640926-AAD7-44d8-BBD7-CCE9431645EC}">
-              <a14:shadowObscured xmlns:a14="http://schemas.microsoft.com/office/drawing/2010/main" xmlns="" val="1"/>
+              <a14:shadowObscured xmlns="" xmlns:a14="http://schemas.microsoft.com/office/drawing/2010/main" val="1"/>
             </a:ext>
           </a:extLst>
         </p:spPr>
@@ -595,14 +595,14 @@
           <a:effectLst/>
           <a:extLst>
             <a:ext uri="{909E8E84-426E-40dd-AFC4-6F175D3DCCD1}">
-              <a14:hiddenFill xmlns:a14="http://schemas.microsoft.com/office/drawing/2010/main" xmlns="">
+              <a14:hiddenFill xmlns="" xmlns:a14="http://schemas.microsoft.com/office/drawing/2010/main">
                 <a:solidFill>
                   <a:schemeClr val="bg1"/>
                 </a:solidFill>
               </a14:hiddenFill>
             </a:ext>
             <a:ext uri="{91240B29-F687-4f45-9708-019B960494DF}">
-              <a14:hiddenLine xmlns:a14="http://schemas.microsoft.com/office/drawing/2010/main" xmlns="" w="12700">
+              <a14:hiddenLine xmlns="" xmlns:a14="http://schemas.microsoft.com/office/drawing/2010/main" w="12700">
                 <a:pattFill prst="narHorz">
                   <a:fgClr>
                     <a:schemeClr val="tx1"/>
@@ -617,7 +617,7 @@
               </a14:hiddenLine>
             </a:ext>
             <a:ext uri="{AF507438-7753-43e0-B8FC-AC1667EBCBE1}">
-              <a14:hiddenEffects xmlns:a14="http://schemas.microsoft.com/office/drawing/2010/main" xmlns="">
+              <a14:hiddenEffects xmlns="" xmlns:a14="http://schemas.microsoft.com/office/drawing/2010/main">
                 <a:effectLst>
                   <a:outerShdw dist="35921" dir="2700000" algn="ctr" rotWithShape="0">
                     <a:schemeClr val="bg2"/>
@@ -867,10 +867,10 @@
         <p:spPr>
           <a:extLst>
             <a:ext uri="{FAA26D3D-D897-4be2-8F04-BA451C77F1D7}">
-              <ma14:placeholderFlag xmlns:ma14="http://schemas.microsoft.com/office/mac/drawingml/2011/main" xmlns="" val="1"/>
+              <ma14:placeholderFlag xmlns="" xmlns:ma14="http://schemas.microsoft.com/office/mac/drawingml/2011/main" val="1"/>
             </a:ext>
             <a:ext uri="{AF507438-7753-43e0-B8FC-AC1667EBCBE1}">
-              <a14:hiddenEffects xmlns:a14="http://schemas.microsoft.com/office/drawing/2010/main" xmlns="">
+              <a14:hiddenEffects xmlns="" xmlns:a14="http://schemas.microsoft.com/office/drawing/2010/main">
                 <a:effectLst>
                   <a:outerShdw blurRad="63500" dist="38099" dir="2700000" algn="ctr" rotWithShape="0">
                     <a:schemeClr val="bg2">
@@ -972,10 +972,6 @@
             </a:r>
           </a:p>
           <a:p>
-            <a:r>
-              <a:rPr lang="en-GB" dirty="0"/>
-              <a:t/>
-            </a:r>
             <a:endParaRPr lang="en-SE" dirty="0"/>
           </a:p>
         </p:txBody>
@@ -1240,13 +1236,6 @@
                 <a:latin typeface="gg sans"/>
               </a:rPr>
               <a:t>A deadlock requires a circular wait. Here every lawyer takes a knife first and a fork second, so a lawyer waiting for a fork holds only a knife, and a lawyer waiting for a knife holds nothing. A lawyer holding a fork already has both utensils and is eating, so it never waits. Hence no cycle can form.</a:t>
-            </a:r>
-            <a:r>
-              <a:rPr lang="en-GB" b="0" i="0" dirty="0">
-                <a:effectLst/>
-                <a:latin typeface="gg sans"/>
-              </a:rPr>
-              <a:t/>
             </a:r>
             <a:endParaRPr lang="en-SE" dirty="0"/>
           </a:p>
@@ -3815,17 +3804,17 @@
           <a:effectLst/>
           <a:extLst>
             <a:ext uri="{FAA26D3D-D897-4be2-8F04-BA451C77F1D7}">
-              <ma14:placeholderFlag xmlns:ma14="http://schemas.microsoft.com/office/mac/drawingml/2011/main" xmlns="" val="1"/>
+              <ma14:placeholderFlag xmlns="" xmlns:ma14="http://schemas.microsoft.com/office/mac/drawingml/2011/main" val="1"/>
             </a:ext>
             <a:ext uri="{909E8E84-426E-40dd-AFC4-6F175D3DCCD1}">
-              <a14:hiddenFill xmlns:a14="http://schemas.microsoft.com/office/drawing/2010/main" xmlns="">
+              <a14:hiddenFill xmlns="" xmlns:a14="http://schemas.microsoft.com/office/drawing/2010/main">
                 <a:solidFill>
                   <a:schemeClr val="bg1"/>
                 </a:solidFill>
               </a14:hiddenFill>
             </a:ext>
             <a:ext uri="{91240B29-F687-4f45-9708-019B960494DF}">
-              <a14:hiddenLine xmlns:a14="http://schemas.microsoft.com/office/drawing/2010/main" xmlns="" w="12700">
+              <a14:hiddenLine xmlns="" xmlns:a14="http://schemas.microsoft.com/office/drawing/2010/main" w="12700">
                 <a:pattFill prst="narHorz">
                   <a:fgClr>
                     <a:schemeClr val="tx1"/>
@@ -3840,7 +3829,7 @@
               </a14:hiddenLine>
             </a:ext>
             <a:ext uri="{AF507438-7753-43e0-B8FC-AC1667EBCBE1}">
-              <a14:hiddenEffects xmlns:a14="http://schemas.microsoft.com/office/drawing/2010/main" xmlns="">
+              <a14:hiddenEffects xmlns="" xmlns:a14="http://schemas.microsoft.com/office/drawing/2010/main">
                 <a:effectLst>
                   <a:outerShdw blurRad="63500" dist="38099" dir="2700000" algn="ctr" rotWithShape="0">
                     <a:schemeClr val="bg2">
@@ -3893,17 +3882,17 @@
           <a:effectLst/>
           <a:extLst>
             <a:ext uri="{FAA26D3D-D897-4be2-8F04-BA451C77F1D7}">
-              <ma14:placeholderFlag xmlns:ma14="http://schemas.microsoft.com/office/mac/drawingml/2011/main" xmlns="" val="1"/>
+              <ma14:placeholderFlag xmlns="" xmlns:ma14="http://schemas.microsoft.com/office/mac/drawingml/2011/main" val="1"/>
             </a:ext>
             <a:ext uri="{909E8E84-426E-40dd-AFC4-6F175D3DCCD1}">
-              <a14:hiddenFill xmlns:a14="http://schemas.microsoft.com/office/drawing/2010/main" xmlns="">
+              <a14:hiddenFill xmlns="" xmlns:a14="http://schemas.microsoft.com/office/drawing/2010/main">
                 <a:solidFill>
                   <a:schemeClr val="bg1"/>
                 </a:solidFill>
               </a14:hiddenFill>
             </a:ext>
             <a:ext uri="{91240B29-F687-4f45-9708-019B960494DF}">
-              <a14:hiddenLine xmlns:a14="http://schemas.microsoft.com/office/drawing/2010/main" xmlns="" w="12700">
+              <a14:hiddenLine xmlns="" xmlns:a14="http://schemas.microsoft.com/office/drawing/2010/main" w="12700">
                 <a:pattFill prst="narHorz">
                   <a:fgClr>
                     <a:schemeClr val="tx1"/>
@@ -3918,7 +3907,7 @@
               </a14:hiddenLine>
             </a:ext>
             <a:ext uri="{AF507438-7753-43e0-B8FC-AC1667EBCBE1}">
-              <a14:hiddenEffects xmlns:a14="http://schemas.microsoft.com/office/drawing/2010/main" xmlns="">
+              <a14:hiddenEffects xmlns="" xmlns:a14="http://schemas.microsoft.com/office/drawing/2010/main">
                 <a:effectLst>
                   <a:outerShdw blurRad="63500" dist="38099" dir="2700000" algn="ctr" rotWithShape="0">
                     <a:schemeClr val="bg2">
@@ -4002,12 +3991,12 @@
           <a:effectLst/>
           <a:extLst>
             <a:ext uri="{909E8E84-426E-40dd-AFC4-6F175D3DCCD1}">
-              <a14:hiddenFill xmlns:a14="http://schemas.microsoft.com/office/drawing/2010/main" xmlns="">
+              <a14:hiddenFill xmlns="" xmlns:a14="http://schemas.microsoft.com/office/drawing/2010/main">
                 <a:noFill/>
               </a14:hiddenFill>
             </a:ext>
             <a:ext uri="{AF507438-7753-43e0-B8FC-AC1667EBCBE1}">
-              <a14:hiddenEffects xmlns:a14="http://schemas.microsoft.com/office/drawing/2010/main" xmlns="">
+              <a14:hiddenEffects xmlns="" xmlns:a14="http://schemas.microsoft.com/office/drawing/2010/main">
                 <a:effectLst>
                   <a:outerShdw blurRad="63500" dist="38099" dir="2700000" algn="ctr" rotWithShape="0">
                     <a:schemeClr val="bg2">
@@ -4915,7 +4904,7 @@
           <a:p>
             <a:pPr eaLnBrk="1" hangingPunct="1"/>
             <a:r>
-              <a:rPr lang="en-US" altLang="zh-CN" dirty="0" sz="2400">
+              <a:rPr lang="en-US" altLang="zh-CN" sz="2400" dirty="0">
                 <a:ea typeface="宋体" charset="-122"/>
               </a:rPr>
               <a:t>Banker’s algorithm: 4 philosophers each holding his left fork ANS</a:t>
@@ -4938,7 +4927,7 @@
           <p:nvPr/>
         </p:nvPicPr>
         <p:blipFill>
-          <a:blip r:embed="rId3" cstate="print"/>
+          <a:blip r:embed="rId4" cstate="print"/>
           <a:srcRect/>
           <a:stretch>
             <a:fillRect/>
@@ -5493,12 +5482,12 @@
           <a:graphicData uri="http://schemas.openxmlformats.org/presentationml/2006/ole">
             <mc:AlternateContent xmlns:mc="http://schemas.openxmlformats.org/markup-compatibility/2006">
               <mc:Choice xmlns:v="urn:schemas-microsoft-com:vml" Requires="v">
-                <p:oleObj name="Equation" r:id="rId4" imgW="1396800" imgH="1346040" progId="Equation.3">
+                <p:oleObj spid="_x0000_s2053" name="Equation" r:id="rId5" imgW="1396800" imgH="1346040" progId="Equation.3">
                   <p:embed/>
                 </p:oleObj>
               </mc:Choice>
               <mc:Fallback>
-                <p:oleObj name="Equation" r:id="rId4" imgW="1396800" imgH="1346040" progId="Equation.3">
+                <p:oleObj name="Equation" r:id="rId5" imgW="1396800" imgH="1346040" progId="Equation.3">
                   <p:embed/>
                   <p:pic>
                     <p:nvPicPr>
@@ -5515,7 +5504,7 @@
                       <p:nvPr/>
                     </p:nvPicPr>
                     <p:blipFill>
-                      <a:blip r:embed="rId5">
+                      <a:blip r:embed="rId6">
                         <a:extLst>
                           <a:ext uri="{28A0092B-C50C-407E-A947-70E740481C1C}">
                             <a14:useLocalDpi xmlns:a14="http://schemas.microsoft.com/office/drawing/2010/main" val="0"/>
@@ -6022,7 +6011,7 @@
                 <a:avLst/>
               </a:prstGeom>
               <a:blipFill>
-                <a:blip r:embed="rId6"/>
+                <a:blip r:embed="rId7"/>
                 <a:stretch>
                   <a:fillRect/>
                 </a:stretch>
@@ -7027,12 +7016,12 @@
           <a:graphicData uri="http://schemas.openxmlformats.org/presentationml/2006/ole">
             <mc:AlternateContent xmlns:mc="http://schemas.openxmlformats.org/markup-compatibility/2006">
               <mc:Choice xmlns:v="urn:schemas-microsoft-com:vml" Requires="v">
-                <p:oleObj name="Equation" r:id="rId2" imgW="1269720" imgH="215640" progId="Equation.3">
+                <p:oleObj spid="_x0000_s3089" name="Equation" r:id="rId3" imgW="1269720" imgH="215640" progId="Equation.3">
                   <p:embed/>
                 </p:oleObj>
               </mc:Choice>
               <mc:Fallback>
-                <p:oleObj name="Equation" r:id="rId2" imgW="1269720" imgH="215640" progId="Equation.3">
+                <p:oleObj name="Equation" r:id="rId3" imgW="1269720" imgH="215640" progId="Equation.3">
                   <p:embed/>
                   <p:pic>
                     <p:nvPicPr>
@@ -7043,7 +7032,7 @@
                       <p:nvPr/>
                     </p:nvPicPr>
                     <p:blipFill>
-                      <a:blip r:embed="rId3">
+                      <a:blip r:embed="rId4">
                         <a:extLst>
                           <a:ext uri="{28A0092B-C50C-407E-A947-70E740481C1C}">
                             <a14:useLocalDpi xmlns:a14="http://schemas.microsoft.com/office/drawing/2010/main" val="0"/>
@@ -7097,12 +7086,12 @@
           <a:graphicData uri="http://schemas.openxmlformats.org/presentationml/2006/ole">
             <mc:AlternateContent xmlns:mc="http://schemas.openxmlformats.org/markup-compatibility/2006">
               <mc:Choice xmlns:v="urn:schemas-microsoft-com:vml" Requires="v">
-                <p:oleObj name="Equation" r:id="rId4" imgW="1396800" imgH="1117440" progId="Equation.3">
+                <p:oleObj spid="_x0000_s3090" name="Equation" r:id="rId5" imgW="1396800" imgH="1117440" progId="Equation.3">
                   <p:embed/>
                 </p:oleObj>
               </mc:Choice>
               <mc:Fallback>
-                <p:oleObj name="Equation" r:id="rId4" imgW="1396800" imgH="1117440" progId="Equation.3">
+                <p:oleObj name="Equation" r:id="rId5" imgW="1396800" imgH="1117440" progId="Equation.3">
                   <p:embed/>
                   <p:pic>
                     <p:nvPicPr>
@@ -7113,7 +7102,7 @@
                       <p:nvPr/>
                     </p:nvPicPr>
                     <p:blipFill>
-                      <a:blip r:embed="rId5">
+                      <a:blip r:embed="rId6">
                         <a:extLst>
                           <a:ext uri="{28A0092B-C50C-407E-A947-70E740481C1C}">
                             <a14:useLocalDpi xmlns:a14="http://schemas.microsoft.com/office/drawing/2010/main" val="0"/>
@@ -7167,12 +7156,12 @@
           <a:graphicData uri="http://schemas.openxmlformats.org/presentationml/2006/ole">
             <mc:AlternateContent xmlns:mc="http://schemas.openxmlformats.org/markup-compatibility/2006">
               <mc:Choice xmlns:v="urn:schemas-microsoft-com:vml" Requires="v">
-                <p:oleObj name="Equation" r:id="rId6" imgW="1396800" imgH="1346040" progId="Equation.3">
+                <p:oleObj spid="_x0000_s3091" name="Equation" r:id="rId7" imgW="1396800" imgH="1346040" progId="Equation.3">
                   <p:embed/>
                 </p:oleObj>
               </mc:Choice>
               <mc:Fallback>
-                <p:oleObj name="Equation" r:id="rId6" imgW="1396800" imgH="1346040" progId="Equation.3">
+                <p:oleObj name="Equation" r:id="rId7" imgW="1396800" imgH="1346040" progId="Equation.3">
                   <p:embed/>
                   <p:pic>
                     <p:nvPicPr>
@@ -7183,7 +7172,7 @@
                       <p:nvPr/>
                     </p:nvPicPr>
                     <p:blipFill>
-                      <a:blip r:embed="rId7">
+                      <a:blip r:embed="rId8">
                         <a:extLst>
                           <a:ext uri="{28A0092B-C50C-407E-A947-70E740481C1C}">
                             <a14:useLocalDpi xmlns:a14="http://schemas.microsoft.com/office/drawing/2010/main" val="0"/>
@@ -7237,12 +7226,12 @@
           <a:graphicData uri="http://schemas.openxmlformats.org/presentationml/2006/ole">
             <mc:AlternateContent xmlns:mc="http://schemas.openxmlformats.org/markup-compatibility/2006">
               <mc:Choice xmlns:v="urn:schemas-microsoft-com:vml" Requires="v">
-                <p:oleObj name="Equation" r:id="rId8" imgW="1396800" imgH="215640" progId="Equation.3">
+                <p:oleObj spid="_x0000_s3092" name="Equation" r:id="rId9" imgW="1396800" imgH="215640" progId="Equation.3">
                   <p:embed/>
                 </p:oleObj>
               </mc:Choice>
               <mc:Fallback>
-                <p:oleObj name="Equation" r:id="rId8" imgW="1396800" imgH="215640" progId="Equation.3">
+                <p:oleObj name="Equation" r:id="rId9" imgW="1396800" imgH="215640" progId="Equation.3">
                   <p:embed/>
                   <p:pic>
                     <p:nvPicPr>
@@ -7253,7 +7242,7 @@
                       <p:nvPr/>
                     </p:nvPicPr>
                     <p:blipFill>
-                      <a:blip r:embed="rId9">
+                      <a:blip r:embed="rId10">
                         <a:extLst>
                           <a:ext uri="{28A0092B-C50C-407E-A947-70E740481C1C}">
                             <a14:useLocalDpi xmlns:a14="http://schemas.microsoft.com/office/drawing/2010/main" val="0"/>
@@ -7595,12 +7584,12 @@
           <a:graphicData uri="http://schemas.openxmlformats.org/presentationml/2006/ole">
             <mc:AlternateContent xmlns:mc="http://schemas.openxmlformats.org/markup-compatibility/2006">
               <mc:Choice xmlns:v="urn:schemas-microsoft-com:vml" Requires="v">
-                <p:oleObj name="Equation" r:id="rId10" imgW="1396800" imgH="1346040" progId="Equation.3">
+                <p:oleObj spid="_x0000_s3093" name="Equation" r:id="rId11" imgW="1396800" imgH="1346040" progId="Equation.3">
                   <p:embed/>
                 </p:oleObj>
               </mc:Choice>
               <mc:Fallback>
-                <p:oleObj name="Equation" r:id="rId10" imgW="1396800" imgH="1346040" progId="Equation.3">
+                <p:oleObj name="Equation" r:id="rId11" imgW="1396800" imgH="1346040" progId="Equation.3">
                   <p:embed/>
                   <p:pic>
                     <p:nvPicPr>
@@ -7617,7 +7606,7 @@
                       <p:nvPr/>
                     </p:nvPicPr>
                     <p:blipFill>
-                      <a:blip r:embed="rId11">
+                      <a:blip r:embed="rId12">
                         <a:extLst>
                           <a:ext uri="{28A0092B-C50C-407E-A947-70E740481C1C}">
                             <a14:useLocalDpi xmlns:a14="http://schemas.microsoft.com/office/drawing/2010/main" val="0"/>
@@ -8066,7 +8055,7 @@
           <a:effectLst/>
           <a:extLst>
             <a:ext uri="{AF507438-7753-43e0-B8FC-AC1667EBCBE1}">
-              <a14:hiddenEffects xmlns="" xmlns:a14="http://schemas.microsoft.com/office/drawing/2010/main">
+              <a14:hiddenEffects xmlns:a14="http://schemas.microsoft.com/office/drawing/2010/main" xmlns="">
                 <a:effectLst>
                   <a:outerShdw dist="35921" dir="2700000" algn="ctr" rotWithShape="0">
                     <a:schemeClr val="bg2"/>
@@ -8332,8 +8321,13 @@
             </a:r>
             <a:r>
               <a:rPr lang="en-GB" dirty="0"/>
-              <a:t> of the table, we should model them as a single resource with multiple instances, instead of multiple resources for the Dining Philosophers, where each fork (chopstick) has a fixed position in-between two philosophers. Hence the R and C matrices have a single column.</a:t>
-            </a:r>
+              <a:t> of the table, we should model them as a single resource type with multiple instances, instead of multiple resource types for the Dining Philosophers, where each fork has a fixed position in-between two philosophers. Hence the R and C matrices have a </a:t>
+            </a:r>
+            <a:r>
+              <a:rPr lang="en-GB"/>
+              <a:t>single column here.</a:t>
+            </a:r>
+            <a:endParaRPr lang="en-GB" dirty="0"/>
           </a:p>
         </p:txBody>
       </p:sp>
@@ -8372,7 +8366,7 @@
           <a:effectLst/>
           <a:extLst>
             <a:ext uri="{AF507438-7753-43e0-B8FC-AC1667EBCBE1}">
-              <a14:hiddenEffects xmlns="" xmlns:a14="http://schemas.microsoft.com/office/drawing/2010/main">
+              <a14:hiddenEffects xmlns:a14="http://schemas.microsoft.com/office/drawing/2010/main" xmlns="">
                 <a:effectLst>
                   <a:outerShdw dist="35921" dir="2700000" algn="ctr" rotWithShape="0">
                     <a:schemeClr val="bg2"/>
@@ -8707,17 +8701,17 @@
           <a:effectLst/>
           <a:extLst>
             <a:ext uri="{FAA26D3D-D897-4be2-8F04-BA451C77F1D7}">
-              <ma14:placeholderFlag xmlns:ma14="http://schemas.microsoft.com/office/mac/drawingml/2011/main" xmlns="" val="1"/>
+              <ma14:placeholderFlag xmlns="" xmlns:ma14="http://schemas.microsoft.com/office/mac/drawingml/2011/main" val="1"/>
             </a:ext>
             <a:ext uri="{909E8E84-426E-40dd-AFC4-6F175D3DCCD1}">
-              <a14:hiddenFill xmlns:a14="http://schemas.microsoft.com/office/drawing/2010/main" xmlns="">
+              <a14:hiddenFill xmlns="" xmlns:a14="http://schemas.microsoft.com/office/drawing/2010/main">
                 <a:solidFill>
                   <a:schemeClr val="bg1"/>
                 </a:solidFill>
               </a14:hiddenFill>
             </a:ext>
             <a:ext uri="{91240B29-F687-4f45-9708-019B960494DF}">
-              <a14:hiddenLine xmlns:a14="http://schemas.microsoft.com/office/drawing/2010/main" xmlns="" w="12700">
+              <a14:hiddenLine xmlns="" xmlns:a14="http://schemas.microsoft.com/office/drawing/2010/main" w="12700">
                 <a:pattFill prst="narHorz">
                   <a:fgClr>
                     <a:schemeClr val="tx1"/>
@@ -8732,7 +8726,7 @@
               </a14:hiddenLine>
             </a:ext>
             <a:ext uri="{AF507438-7753-43e0-B8FC-AC1667EBCBE1}">
-              <a14:hiddenEffects xmlns:a14="http://schemas.microsoft.com/office/drawing/2010/main" xmlns="">
+              <a14:hiddenEffects xmlns="" xmlns:a14="http://schemas.microsoft.com/office/drawing/2010/main">
                 <a:effectLst>
                   <a:outerShdw blurRad="63500" dist="38099" dir="2700000" algn="ctr" rotWithShape="0">
                     <a:schemeClr val="bg2">
@@ -10222,17 +10216,17 @@
           <a:effectLst/>
           <a:extLst>
             <a:ext uri="{FAA26D3D-D897-4be2-8F04-BA451C77F1D7}">
-              <ma14:placeholderFlag xmlns:ma14="http://schemas.microsoft.com/office/mac/drawingml/2011/main" xmlns="" val="1"/>
+              <ma14:placeholderFlag xmlns="" xmlns:ma14="http://schemas.microsoft.com/office/mac/drawingml/2011/main" val="1"/>
             </a:ext>
             <a:ext uri="{909E8E84-426E-40dd-AFC4-6F175D3DCCD1}">
-              <a14:hiddenFill xmlns:a14="http://schemas.microsoft.com/office/drawing/2010/main" xmlns="">
+              <a14:hiddenFill xmlns="" xmlns:a14="http://schemas.microsoft.com/office/drawing/2010/main">
                 <a:solidFill>
                   <a:schemeClr val="bg1"/>
                 </a:solidFill>
               </a14:hiddenFill>
             </a:ext>
             <a:ext uri="{91240B29-F687-4f45-9708-019B960494DF}">
-              <a14:hiddenLine xmlns:a14="http://schemas.microsoft.com/office/drawing/2010/main" xmlns="" w="12700">
+              <a14:hiddenLine xmlns="" xmlns:a14="http://schemas.microsoft.com/office/drawing/2010/main" w="12700">
                 <a:pattFill prst="narHorz">
                   <a:fgClr>
                     <a:schemeClr val="tx1"/>
@@ -10247,7 +10241,7 @@
               </a14:hiddenLine>
             </a:ext>
             <a:ext uri="{AF507438-7753-43e0-B8FC-AC1667EBCBE1}">
-              <a14:hiddenEffects xmlns:a14="http://schemas.microsoft.com/office/drawing/2010/main" xmlns="">
+              <a14:hiddenEffects xmlns="" xmlns:a14="http://schemas.microsoft.com/office/drawing/2010/main">
                 <a:effectLst>
                   <a:outerShdw blurRad="63500" dist="38099" dir="2700000" algn="ctr" rotWithShape="0">
                     <a:schemeClr val="bg2">
@@ -11041,17 +11035,17 @@
           <a:effectLst/>
           <a:extLst>
             <a:ext uri="{FAA26D3D-D897-4be2-8F04-BA451C77F1D7}">
-              <ma14:placeholderFlag xmlns:ma14="http://schemas.microsoft.com/office/mac/drawingml/2011/main" xmlns="" val="1"/>
+              <ma14:placeholderFlag xmlns="" xmlns:ma14="http://schemas.microsoft.com/office/mac/drawingml/2011/main" val="1"/>
             </a:ext>
             <a:ext uri="{909E8E84-426E-40dd-AFC4-6F175D3DCCD1}">
-              <a14:hiddenFill xmlns:a14="http://schemas.microsoft.com/office/drawing/2010/main" xmlns="">
+              <a14:hiddenFill xmlns="" xmlns:a14="http://schemas.microsoft.com/office/drawing/2010/main">
                 <a:solidFill>
                   <a:schemeClr val="bg1"/>
                 </a:solidFill>
               </a14:hiddenFill>
             </a:ext>
             <a:ext uri="{91240B29-F687-4f45-9708-019B960494DF}">
-              <a14:hiddenLine xmlns:a14="http://schemas.microsoft.com/office/drawing/2010/main" xmlns="" w="12700">
+              <a14:hiddenLine xmlns="" xmlns:a14="http://schemas.microsoft.com/office/drawing/2010/main" w="12700">
                 <a:pattFill prst="narHorz">
                   <a:fgClr>
                     <a:schemeClr val="tx1"/>
@@ -11066,7 +11060,7 @@
               </a14:hiddenLine>
             </a:ext>
             <a:ext uri="{AF507438-7753-43e0-B8FC-AC1667EBCBE1}">
-              <a14:hiddenEffects xmlns:a14="http://schemas.microsoft.com/office/drawing/2010/main" xmlns="">
+              <a14:hiddenEffects xmlns="" xmlns:a14="http://schemas.microsoft.com/office/drawing/2010/main">
                 <a:effectLst>
                   <a:outerShdw blurRad="63500" dist="38099" dir="2700000" algn="ctr" rotWithShape="0">
                     <a:schemeClr val="bg2">
@@ -11427,17 +11421,17 @@
           <a:effectLst/>
           <a:extLst>
             <a:ext uri="{FAA26D3D-D897-4be2-8F04-BA451C77F1D7}">
-              <ma14:placeholderFlag xmlns:ma14="http://schemas.microsoft.com/office/mac/drawingml/2011/main" xmlns="" val="1"/>
+              <ma14:placeholderFlag xmlns="" xmlns:ma14="http://schemas.microsoft.com/office/mac/drawingml/2011/main" val="1"/>
             </a:ext>
             <a:ext uri="{909E8E84-426E-40dd-AFC4-6F175D3DCCD1}">
-              <a14:hiddenFill xmlns:a14="http://schemas.microsoft.com/office/drawing/2010/main" xmlns="">
+              <a14:hiddenFill xmlns="" xmlns:a14="http://schemas.microsoft.com/office/drawing/2010/main">
                 <a:solidFill>
                   <a:schemeClr val="bg1"/>
                 </a:solidFill>
               </a14:hiddenFill>
             </a:ext>
             <a:ext uri="{91240B29-F687-4f45-9708-019B960494DF}">
-              <a14:hiddenLine xmlns:a14="http://schemas.microsoft.com/office/drawing/2010/main" xmlns="" w="12700">
+              <a14:hiddenLine xmlns="" xmlns:a14="http://schemas.microsoft.com/office/drawing/2010/main" w="12700">
                 <a:pattFill prst="narHorz">
                   <a:fgClr>
                     <a:schemeClr val="tx1"/>
@@ -11452,7 +11446,7 @@
               </a14:hiddenLine>
             </a:ext>
             <a:ext uri="{AF507438-7753-43e0-B8FC-AC1667EBCBE1}">
-              <a14:hiddenEffects xmlns:a14="http://schemas.microsoft.com/office/drawing/2010/main" xmlns="">
+              <a14:hiddenEffects xmlns="" xmlns:a14="http://schemas.microsoft.com/office/drawing/2010/main">
                 <a:effectLst>
                   <a:outerShdw blurRad="63500" dist="38099" dir="2700000" algn="ctr" rotWithShape="0">
                     <a:schemeClr val="bg2">
@@ -12978,17 +12972,17 @@
           <a:effectLst/>
           <a:extLst>
             <a:ext uri="{FAA26D3D-D897-4be2-8F04-BA451C77F1D7}">
-              <ma14:placeholderFlag xmlns:ma14="http://schemas.microsoft.com/office/mac/drawingml/2011/main" xmlns="" val="1"/>
+              <ma14:placeholderFlag xmlns="" xmlns:ma14="http://schemas.microsoft.com/office/mac/drawingml/2011/main" val="1"/>
             </a:ext>
             <a:ext uri="{909E8E84-426E-40dd-AFC4-6F175D3DCCD1}">
-              <a14:hiddenFill xmlns:a14="http://schemas.microsoft.com/office/drawing/2010/main" xmlns="">
+              <a14:hiddenFill xmlns="" xmlns:a14="http://schemas.microsoft.com/office/drawing/2010/main">
                 <a:solidFill>
                   <a:schemeClr val="bg1"/>
                 </a:solidFill>
               </a14:hiddenFill>
             </a:ext>
             <a:ext uri="{91240B29-F687-4f45-9708-019B960494DF}">
-              <a14:hiddenLine xmlns:a14="http://schemas.microsoft.com/office/drawing/2010/main" xmlns="" w="12700">
+              <a14:hiddenLine xmlns="" xmlns:a14="http://schemas.microsoft.com/office/drawing/2010/main" w="12700">
                 <a:pattFill prst="narHorz">
                   <a:fgClr>
                     <a:schemeClr val="tx1"/>
@@ -13003,7 +12997,7 @@
               </a14:hiddenLine>
             </a:ext>
             <a:ext uri="{AF507438-7753-43e0-B8FC-AC1667EBCBE1}">
-              <a14:hiddenEffects xmlns:a14="http://schemas.microsoft.com/office/drawing/2010/main" xmlns="">
+              <a14:hiddenEffects xmlns="" xmlns:a14="http://schemas.microsoft.com/office/drawing/2010/main">
                 <a:effectLst>
                   <a:outerShdw blurRad="63500" dist="38099" dir="2700000" algn="ctr" rotWithShape="0">
                     <a:schemeClr val="bg2">
@@ -13620,17 +13614,17 @@
           <a:effectLst/>
           <a:extLst>
             <a:ext uri="{FAA26D3D-D897-4be2-8F04-BA451C77F1D7}">
-              <ma14:placeholderFlag xmlns:ma14="http://schemas.microsoft.com/office/mac/drawingml/2011/main" xmlns="" val="1"/>
+              <ma14:placeholderFlag xmlns="" xmlns:ma14="http://schemas.microsoft.com/office/mac/drawingml/2011/main" val="1"/>
             </a:ext>
             <a:ext uri="{909E8E84-426E-40dd-AFC4-6F175D3DCCD1}">
-              <a14:hiddenFill xmlns:a14="http://schemas.microsoft.com/office/drawing/2010/main" xmlns="">
+              <a14:hiddenFill xmlns="" xmlns:a14="http://schemas.microsoft.com/office/drawing/2010/main">
                 <a:solidFill>
                   <a:schemeClr val="bg1"/>
                 </a:solidFill>
               </a14:hiddenFill>
             </a:ext>
             <a:ext uri="{91240B29-F687-4f45-9708-019B960494DF}">
-              <a14:hiddenLine xmlns:a14="http://schemas.microsoft.com/office/drawing/2010/main" xmlns="" w="12700">
+              <a14:hiddenLine xmlns="" xmlns:a14="http://schemas.microsoft.com/office/drawing/2010/main" w="12700">
                 <a:pattFill prst="narHorz">
                   <a:fgClr>
                     <a:schemeClr val="tx1"/>
@@ -13645,7 +13639,7 @@
               </a14:hiddenLine>
             </a:ext>
             <a:ext uri="{AF507438-7753-43e0-B8FC-AC1667EBCBE1}">
-              <a14:hiddenEffects xmlns:a14="http://schemas.microsoft.com/office/drawing/2010/main" xmlns="">
+              <a14:hiddenEffects xmlns="" xmlns:a14="http://schemas.microsoft.com/office/drawing/2010/main">
                 <a:effectLst>
                   <a:outerShdw blurRad="63500" dist="38099" dir="2700000" algn="ctr" rotWithShape="0">
                     <a:schemeClr val="bg2">
@@ -15954,7 +15948,7 @@
         </p:spPr>
         <p:txBody>
           <a:bodyPr>
-            <a:normAutofit fontScale="92500"/>
+            <a:normAutofit fontScale="92500" lnSpcReduction="10000"/>
           </a:bodyPr>
           <a:lstStyle/>
           <a:p>
@@ -16069,7 +16063,7 @@
           <a:p>
             <a:r>
               <a:rPr lang="en-GB" dirty="0"/>
-              <a:t>Solution: each thread should acquire locks in the same order, say, L1, L2, L3.</a:t>
+              <a:t>Solution: each thread should acquire locks in the same total order, say, L1, L2, L3.</a:t>
             </a:r>
           </a:p>
           <a:p>
@@ -18329,17 +18323,17 @@
           <a:effectLst/>
           <a:extLst>
             <a:ext uri="{FAA26D3D-D897-4be2-8F04-BA451C77F1D7}">
-              <ma14:placeholderFlag xmlns:ma14="http://schemas.microsoft.com/office/mac/drawingml/2011/main" xmlns="" val="1"/>
+              <ma14:placeholderFlag xmlns="" xmlns:ma14="http://schemas.microsoft.com/office/mac/drawingml/2011/main" val="1"/>
             </a:ext>
             <a:ext uri="{909E8E84-426E-40dd-AFC4-6F175D3DCCD1}">
-              <a14:hiddenFill xmlns:a14="http://schemas.microsoft.com/office/drawing/2010/main" xmlns="">
+              <a14:hiddenFill xmlns="" xmlns:a14="http://schemas.microsoft.com/office/drawing/2010/main">
                 <a:solidFill>
                   <a:schemeClr val="bg1"/>
                 </a:solidFill>
               </a14:hiddenFill>
             </a:ext>
             <a:ext uri="{91240B29-F687-4f45-9708-019B960494DF}">
-              <a14:hiddenLine xmlns:a14="http://schemas.microsoft.com/office/drawing/2010/main" xmlns="" w="12700">
+              <a14:hiddenLine xmlns="" xmlns:a14="http://schemas.microsoft.com/office/drawing/2010/main" w="12700">
                 <a:pattFill prst="narHorz">
                   <a:fgClr>
                     <a:schemeClr val="tx1"/>
@@ -18354,7 +18348,7 @@
               </a14:hiddenLine>
             </a:ext>
             <a:ext uri="{AF507438-7753-43e0-B8FC-AC1667EBCBE1}">
-              <a14:hiddenEffects xmlns:a14="http://schemas.microsoft.com/office/drawing/2010/main" xmlns="">
+              <a14:hiddenEffects xmlns="" xmlns:a14="http://schemas.microsoft.com/office/drawing/2010/main">
                 <a:effectLst>
                   <a:outerShdw blurRad="63500" dist="38099" dir="2700000" algn="ctr" rotWithShape="0">
                     <a:schemeClr val="bg2">
@@ -18948,17 +18942,17 @@
           <a:effectLst/>
           <a:extLst>
             <a:ext uri="{FAA26D3D-D897-4be2-8F04-BA451C77F1D7}">
-              <ma14:placeholderFlag xmlns:ma14="http://schemas.microsoft.com/office/mac/drawingml/2011/main" xmlns="" val="1"/>
+              <ma14:placeholderFlag xmlns="" xmlns:ma14="http://schemas.microsoft.com/office/mac/drawingml/2011/main" val="1"/>
             </a:ext>
             <a:ext uri="{909E8E84-426E-40dd-AFC4-6F175D3DCCD1}">
-              <a14:hiddenFill xmlns:a14="http://schemas.microsoft.com/office/drawing/2010/main" xmlns="">
+              <a14:hiddenFill xmlns="" xmlns:a14="http://schemas.microsoft.com/office/drawing/2010/main">
                 <a:solidFill>
                   <a:schemeClr val="bg1"/>
                 </a:solidFill>
               </a14:hiddenFill>
             </a:ext>
             <a:ext uri="{91240B29-F687-4f45-9708-019B960494DF}">
-              <a14:hiddenLine xmlns:a14="http://schemas.microsoft.com/office/drawing/2010/main" xmlns="" w="12700">
+              <a14:hiddenLine xmlns="" xmlns:a14="http://schemas.microsoft.com/office/drawing/2010/main" w="12700">
                 <a:pattFill prst="narHorz">
                   <a:fgClr>
                     <a:schemeClr val="tx1"/>
@@ -18973,7 +18967,7 @@
               </a14:hiddenLine>
             </a:ext>
             <a:ext uri="{AF507438-7753-43e0-B8FC-AC1667EBCBE1}">
-              <a14:hiddenEffects xmlns:a14="http://schemas.microsoft.com/office/drawing/2010/main" xmlns="">
+              <a14:hiddenEffects xmlns="" xmlns:a14="http://schemas.microsoft.com/office/drawing/2010/main">
                 <a:effectLst>
                   <a:outerShdw blurRad="63500" dist="38099" dir="2700000" algn="ctr" rotWithShape="0">
                     <a:schemeClr val="bg2">
@@ -19490,17 +19484,17 @@
           <a:effectLst/>
           <a:extLst>
             <a:ext uri="{FAA26D3D-D897-4be2-8F04-BA451C77F1D7}">
-              <ma14:placeholderFlag xmlns:ma14="http://schemas.microsoft.com/office/mac/drawingml/2011/main" xmlns="" val="1"/>
+              <ma14:placeholderFlag xmlns="" xmlns:ma14="http://schemas.microsoft.com/office/mac/drawingml/2011/main" val="1"/>
             </a:ext>
             <a:ext uri="{909E8E84-426E-40dd-AFC4-6F175D3DCCD1}">
-              <a14:hiddenFill xmlns:a14="http://schemas.microsoft.com/office/drawing/2010/main" xmlns="">
+              <a14:hiddenFill xmlns="" xmlns:a14="http://schemas.microsoft.com/office/drawing/2010/main">
                 <a:solidFill>
                   <a:schemeClr val="bg1"/>
                 </a:solidFill>
               </a14:hiddenFill>
             </a:ext>
             <a:ext uri="{91240B29-F687-4f45-9708-019B960494DF}">
-              <a14:hiddenLine xmlns:a14="http://schemas.microsoft.com/office/drawing/2010/main" xmlns="" w="12700">
+              <a14:hiddenLine xmlns="" xmlns:a14="http://schemas.microsoft.com/office/drawing/2010/main" w="12700">
                 <a:pattFill prst="narHorz">
                   <a:fgClr>
                     <a:schemeClr val="tx1"/>
@@ -19515,7 +19509,7 @@
               </a14:hiddenLine>
             </a:ext>
             <a:ext uri="{AF507438-7753-43e0-B8FC-AC1667EBCBE1}">
-              <a14:hiddenEffects xmlns:a14="http://schemas.microsoft.com/office/drawing/2010/main" xmlns="">
+              <a14:hiddenEffects xmlns="" xmlns:a14="http://schemas.microsoft.com/office/drawing/2010/main">
                 <a:effectLst>
                   <a:outerShdw blurRad="63500" dist="38099" dir="2700000" algn="ctr" rotWithShape="0">
                     <a:schemeClr val="bg2">
@@ -20786,17 +20780,17 @@
           <a:effectLst/>
           <a:extLst>
             <a:ext uri="{FAA26D3D-D897-4be2-8F04-BA451C77F1D7}">
-              <ma14:placeholderFlag xmlns:ma14="http://schemas.microsoft.com/office/mac/drawingml/2011/main" xmlns="" val="1"/>
+              <ma14:placeholderFlag xmlns="" xmlns:ma14="http://schemas.microsoft.com/office/mac/drawingml/2011/main" val="1"/>
             </a:ext>
             <a:ext uri="{909E8E84-426E-40dd-AFC4-6F175D3DCCD1}">
-              <a14:hiddenFill xmlns:a14="http://schemas.microsoft.com/office/drawing/2010/main" xmlns="">
+              <a14:hiddenFill xmlns="" xmlns:a14="http://schemas.microsoft.com/office/drawing/2010/main">
                 <a:solidFill>
                   <a:schemeClr val="bg1"/>
                 </a:solidFill>
               </a14:hiddenFill>
             </a:ext>
             <a:ext uri="{91240B29-F687-4f45-9708-019B960494DF}">
-              <a14:hiddenLine xmlns:a14="http://schemas.microsoft.com/office/drawing/2010/main" xmlns="" w="12700">
+              <a14:hiddenLine xmlns="" xmlns:a14="http://schemas.microsoft.com/office/drawing/2010/main" w="12700">
                 <a:pattFill prst="narHorz">
                   <a:fgClr>
                     <a:schemeClr val="tx1"/>
@@ -20811,7 +20805,7 @@
               </a14:hiddenLine>
             </a:ext>
             <a:ext uri="{AF507438-7753-43e0-B8FC-AC1667EBCBE1}">
-              <a14:hiddenEffects xmlns:a14="http://schemas.microsoft.com/office/drawing/2010/main" xmlns="">
+              <a14:hiddenEffects xmlns="" xmlns:a14="http://schemas.microsoft.com/office/drawing/2010/main">
                 <a:effectLst>
                   <a:outerShdw blurRad="63500" dist="38099" dir="2700000" algn="ctr" rotWithShape="0">
                     <a:schemeClr val="bg2">
@@ -21063,7 +21057,7 @@
           <a:effectLst/>
           <a:extLst>
             <a:ext uri="{AF507438-7753-43e0-B8FC-AC1667EBCBE1}">
-              <a14:hiddenEffects xmlns="" xmlns:a14="http://schemas.microsoft.com/office/drawing/2010/main">
+              <a14:hiddenEffects xmlns:a14="http://schemas.microsoft.com/office/drawing/2010/main" xmlns="">
                 <a:effectLst>
                   <a:outerShdw dist="35921" dir="2700000" algn="ctr" rotWithShape="0">
                     <a:schemeClr val="bg2"/>
@@ -25069,7 +25063,7 @@
           </a:ln>
           <a:extLst>
             <a:ext uri="{AF507438-7753-43e0-B8FC-AC1667EBCBE1}">
-              <a14:hiddenEffects xmlns="" xmlns:a14="http://schemas.microsoft.com/office/drawing/2010/main">
+              <a14:hiddenEffects xmlns:a14="http://schemas.microsoft.com/office/drawing/2010/main" xmlns="">
                 <a:effectLst>
                   <a:outerShdw dist="35921" dir="2700000" algn="ctr" rotWithShape="0">
                     <a:schemeClr val="bg2"/>
@@ -33970,12 +33964,12 @@
           <a:graphicData uri="http://schemas.openxmlformats.org/presentationml/2006/ole">
             <mc:AlternateContent xmlns:mc="http://schemas.openxmlformats.org/markup-compatibility/2006">
               <mc:Choice xmlns:v="urn:schemas-microsoft-com:vml" Requires="v">
-                <p:oleObj name="Equation" r:id="rId2" imgW="1269720" imgH="215640" progId="Equation.3">
+                <p:oleObj spid="_x0000_s1041" name="Equation" r:id="rId3" imgW="1269720" imgH="215640" progId="Equation.3">
                   <p:embed/>
                 </p:oleObj>
               </mc:Choice>
               <mc:Fallback>
-                <p:oleObj name="Equation" r:id="rId2" imgW="1269720" imgH="215640" progId="Equation.3">
+                <p:oleObj name="Equation" r:id="rId3" imgW="1269720" imgH="215640" progId="Equation.3">
                   <p:embed/>
                   <p:pic>
                     <p:nvPicPr>
@@ -33986,7 +33980,7 @@
                       <p:nvPr/>
                     </p:nvPicPr>
                     <p:blipFill>
-                      <a:blip r:embed="rId3">
+                      <a:blip r:embed="rId4">
                         <a:extLst>
                           <a:ext uri="{28A0092B-C50C-407E-A947-70E740481C1C}">
                             <a14:useLocalDpi xmlns:a14="http://schemas.microsoft.com/office/drawing/2010/main" val="0"/>
@@ -34046,12 +34040,12 @@
           <a:graphicData uri="http://schemas.openxmlformats.org/presentationml/2006/ole">
             <mc:AlternateContent xmlns:mc="http://schemas.openxmlformats.org/markup-compatibility/2006">
               <mc:Choice xmlns:v="urn:schemas-microsoft-com:vml" Requires="v">
-                <p:oleObj name="Equation" r:id="rId4" imgW="1371600" imgH="215640" progId="Equation.3">
+                <p:oleObj spid="_x0000_s1042" name="Equation" r:id="rId5" imgW="1371600" imgH="215640" progId="Equation.3">
                   <p:embed/>
                 </p:oleObj>
               </mc:Choice>
               <mc:Fallback>
-                <p:oleObj name="Equation" r:id="rId4" imgW="1371600" imgH="215640" progId="Equation.3">
+                <p:oleObj name="Equation" r:id="rId5" imgW="1371600" imgH="215640" progId="Equation.3">
                   <p:embed/>
                   <p:pic>
                     <p:nvPicPr>
@@ -34062,7 +34056,7 @@
                       <p:nvPr/>
                     </p:nvPicPr>
                     <p:blipFill>
-                      <a:blip r:embed="rId5">
+                      <a:blip r:embed="rId6">
                         <a:extLst>
                           <a:ext uri="{28A0092B-C50C-407E-A947-70E740481C1C}">
                             <a14:useLocalDpi xmlns:a14="http://schemas.microsoft.com/office/drawing/2010/main" val="0"/>
@@ -34299,12 +34293,12 @@
           <a:graphicData uri="http://schemas.openxmlformats.org/presentationml/2006/ole">
             <mc:AlternateContent xmlns:mc="http://schemas.openxmlformats.org/markup-compatibility/2006">
               <mc:Choice xmlns:v="urn:schemas-microsoft-com:vml" Requires="v">
-                <p:oleObj name="Equation" r:id="rId6" imgW="1396800" imgH="1117440" progId="Equation.3">
+                <p:oleObj spid="_x0000_s1043" name="Equation" r:id="rId7" imgW="1396800" imgH="1117440" progId="Equation.3">
                   <p:embed/>
                 </p:oleObj>
               </mc:Choice>
               <mc:Fallback>
-                <p:oleObj name="Equation" r:id="rId6" imgW="1396800" imgH="1117440" progId="Equation.3">
+                <p:oleObj name="Equation" r:id="rId7" imgW="1396800" imgH="1117440" progId="Equation.3">
                   <p:embed/>
                   <p:pic>
                     <p:nvPicPr>
@@ -34315,7 +34309,7 @@
                       <p:nvPr/>
                     </p:nvPicPr>
                     <p:blipFill>
-                      <a:blip r:embed="rId7">
+                      <a:blip r:embed="rId8">
                         <a:extLst>
                           <a:ext uri="{28A0092B-C50C-407E-A947-70E740481C1C}">
                             <a14:useLocalDpi xmlns:a14="http://schemas.microsoft.com/office/drawing/2010/main" val="0"/>
@@ -34375,12 +34369,12 @@
           <a:graphicData uri="http://schemas.openxmlformats.org/presentationml/2006/ole">
             <mc:AlternateContent xmlns:mc="http://schemas.openxmlformats.org/markup-compatibility/2006">
               <mc:Choice xmlns:v="urn:schemas-microsoft-com:vml" Requires="v">
-                <p:oleObj name="Equation" r:id="rId8" imgW="1396800" imgH="1346040" progId="Equation.3">
+                <p:oleObj spid="_x0000_s1044" name="Equation" r:id="rId9" imgW="1396800" imgH="1346040" progId="Equation.3">
                   <p:embed/>
                 </p:oleObj>
               </mc:Choice>
               <mc:Fallback>
-                <p:oleObj name="Equation" r:id="rId8" imgW="1396800" imgH="1346040" progId="Equation.3">
+                <p:oleObj name="Equation" r:id="rId9" imgW="1396800" imgH="1346040" progId="Equation.3">
                   <p:embed/>
                   <p:pic>
                     <p:nvPicPr>
@@ -34391,7 +34385,7 @@
                       <p:nvPr/>
                     </p:nvPicPr>
                     <p:blipFill>
-                      <a:blip r:embed="rId9">
+                      <a:blip r:embed="rId10">
                         <a:extLst>
                           <a:ext uri="{28A0092B-C50C-407E-A947-70E740481C1C}">
                             <a14:useLocalDpi xmlns:a14="http://schemas.microsoft.com/office/drawing/2010/main" val="0"/>
@@ -34591,12 +34585,12 @@
           <a:graphicData uri="http://schemas.openxmlformats.org/presentationml/2006/ole">
             <mc:AlternateContent xmlns:mc="http://schemas.openxmlformats.org/markup-compatibility/2006">
               <mc:Choice xmlns:v="urn:schemas-microsoft-com:vml" Requires="v">
-                <p:oleObj name="Equation" r:id="rId8" imgW="1396800" imgH="1346040" progId="Equation.3">
+                <p:oleObj spid="_x0000_s1045" name="Equation" r:id="rId9" imgW="1396800" imgH="1346040" progId="Equation.3">
                   <p:embed/>
                 </p:oleObj>
               </mc:Choice>
               <mc:Fallback>
-                <p:oleObj name="Equation" r:id="rId8" imgW="1396800" imgH="1346040" progId="Equation.3">
+                <p:oleObj name="Equation" r:id="rId9" imgW="1396800" imgH="1346040" progId="Equation.3">
                   <p:embed/>
                   <p:pic>
                     <p:nvPicPr>
@@ -34613,7 +34607,7 @@
                       <p:nvPr/>
                     </p:nvPicPr>
                     <p:blipFill>
-                      <a:blip r:embed="rId9">
+                      <a:blip r:embed="rId10">
                         <a:extLst>
                           <a:ext uri="{28A0092B-C50C-407E-A947-70E740481C1C}">
                             <a14:useLocalDpi xmlns:a14="http://schemas.microsoft.com/office/drawing/2010/main" val="0"/>
@@ -35120,7 +35114,7 @@
                 <a:avLst/>
               </a:prstGeom>
               <a:blipFill>
-                <a:blip r:embed="rId10"/>
+                <a:blip r:embed="rId11"/>
                 <a:stretch>
                   <a:fillRect/>
                 </a:stretch>
@@ -36172,7 +36166,7 @@
         <a:effectLst/>
         <a:extLst>
           <a:ext uri="{AF507438-7753-43e0-B8FC-AC1667EBCBE1}">
-            <a14:hiddenEffects xmlns:a14="http://schemas.microsoft.com/office/drawing/2010/main" xmlns="">
+            <a14:hiddenEffects xmlns="" xmlns:a14="http://schemas.microsoft.com/office/drawing/2010/main">
               <a:effectLst>
                 <a:outerShdw dist="35921" dir="2700000" algn="ctr" rotWithShape="0">
                   <a:schemeClr val="bg2"/>
@@ -36245,7 +36239,7 @@
         <a:effectLst/>
         <a:extLst>
           <a:ext uri="{AF507438-7753-43e0-B8FC-AC1667EBCBE1}">
-            <a14:hiddenEffects xmlns:a14="http://schemas.microsoft.com/office/drawing/2010/main" xmlns="">
+            <a14:hiddenEffects xmlns="" xmlns:a14="http://schemas.microsoft.com/office/drawing/2010/main">
               <a:effectLst>
                 <a:outerShdw dist="35921" dir="2700000" algn="ctr" rotWithShape="0">
                   <a:schemeClr val="bg2"/>
